--- a/decks/combined-circuits/combined-circuits_ch2_charge-and-current.pptx
+++ b/decks/combined-circuits/combined-circuits_ch2_charge-and-current.pptx
@@ -121,47 +121,47 @@
   <p:extLst>
     <p:ext uri="{521415D9-36F7-43E2-AB2F-B90AF26B5E84}">
       <p14:sectionLst xmlns:p14="http://schemas.microsoft.com/office/powerpoint/2010/main">
-        <p14:section name="Opening" id="{f2c417d0-3b3b-d0d6-d76c-15455c857508}">
+        <p14:section name="Opening" id="{49bfefda-e58c-c958-f493-9e47c7b62fe0}">
           <p14:sldIdLst>
             <p14:sldId id="256"/>
           </p14:sldIdLst>
         </p14:section>
-        <p14:section name="Gate" id="{e90c05ab-04de-72a3-a6e8-0ba9ba63b073}">
+        <p14:section name="Gate" id="{2b6a2d31-9393-435c-ed5a-a0ed9ab0a35a}">
           <p14:sldIdLst>
             <p14:sldId id="257"/>
             <p14:sldId id="258"/>
           </p14:sldIdLst>
         </p14:section>
-        <p14:section name="Pre-teach" id="{f1631e8b-b0bd-3d63-ae50-a8a11eca60cc}">
+        <p14:section name="Pre-teach" id="{7b73f02a-61ab-10e5-2f8c-465db1da7e96}">
           <p14:sldIdLst>
             <p14:sldId id="259"/>
           </p14:sldIdLst>
         </p14:section>
-        <p14:section name="Read-along" id="{adaa6d09-3695-b8d5-fed4-5a483c0d370f}">
+        <p14:section name="Read-along" id="{b56089b0-1a9a-4ac6-2463-2136a40d7c98}">
           <p14:sldIdLst>
             <p14:sldId id="260"/>
             <p14:sldId id="261"/>
           </p14:sldIdLst>
         </p14:section>
-        <p14:section name="Teach" id="{7f32c4dc-1d8e-ae17-1bf5-76cc51963d04}">
+        <p14:section name="Teach" id="{566af7ce-f839-0dec-0794-9f9beba8cfb1}">
           <p14:sldIdLst>
             <p14:sldId id="262"/>
             <p14:sldId id="263"/>
             <p14:sldId id="264"/>
           </p14:sldIdLst>
         </p14:section>
-        <p14:section name="Routes" id="{b8f1a539-f42d-8006-77c3-e101591a67f3}">
+        <p14:section name="Routes" id="{e18d2673-37ce-c747-1452-e0164fe5d96e}">
           <p14:sldIdLst>
             <p14:sldId id="265"/>
             <p14:sldId id="266"/>
           </p14:sldIdLst>
         </p14:section>
-        <p14:section name="Close" id="{c7fa2b7f-3cd4-4c81-bad5-dd079ab8c7b9}">
+        <p14:section name="Close" id="{f090f7a3-4ca7-1825-4f43-69910a8759be}">
           <p14:sldIdLst>
             <p14:sldId id="267"/>
           </p14:sldIdLst>
         </p14:section>
-        <p14:section name="Answers" id="{2489c26b-cf22-45f0-c58c-ea4367f328b0}">
+        <p14:section name="Answers" id="{5f1de24b-44bb-1bf4-8bda-989511173f32}">
           <p14:sldIdLst>
             <p14:sldId id="268"/>
             <p14:sldId id="269"/>
@@ -1218,8 +1218,8 @@
               <a:rPr lang="en-US" dirty="0"/>
               <a:t>Do now — retrieval. Silent, no notes, no help: recall comes before any support. Give about four minutes.
 1. A current of 2 A flows for 10 s. Calculate the charge in coulombs.  →  20 C
-2. What is the unit of charge?  →  C   coulomb (C)
-3. Which sentence describes electric current?  →  A   the rate of flow of charge
+2. What is the unit of charge?  →  A   coulomb (C)
+3. Which sentence describes electric current?  →  D   the rate of flow of charge
 Circulate: who gets 3/3 (Stretch route), 2/3 (Core), 0–1 (Support)? Use this to route pupils later in the lesson.</a:t>
             </a:r>
             <a:endParaRPr lang="en-US" dirty="0"/>
@@ -1310,8 +1310,8 @@
               <a:rPr lang="en-US" dirty="0"/>
               <a:t>Answers — pupils mark their own in a different colour, then hands up for 3/3, 2/3, 1/3.
 1. 20 C. Q = I t = 2 × 10 = 20 C. Whole-number data, so a whole-number answer.
-2. C   coulomb (C). Charge Q is measured in coulombs, C. Current is in amperes, potential difference in volts, resistance in ohms.
-3. A   the rate of flow of charge. Current is the rate of flow of charge: how much charge passes a point each second.
+2. A   coulomb (C). Charge Q is measured in coulombs, C. Current is in amperes, potential difference in volts, resistance in ohms.
+3. D   the rate of flow of charge. Current is the rate of flow of charge: how much charge passes a point each second.
 Say the route each score points to: 3/3 Stretch, 2/3 Core, 0–1 Support. Pupils may choose to move up.</a:t>
             </a:r>
             <a:endParaRPr lang="en-US" dirty="0"/>
@@ -7860,7 +7860,7 @@
                 <a:ea typeface="Calibri" pitchFamily="34" charset="-122"/>
                 <a:cs typeface="Calibri" pitchFamily="34" charset="-120"/>
               </a:rPr>
-              <a:t>ampere (A)</a:t>
+              <a:t>coulomb (C)</a:t>
             </a:r>
             <a:endParaRPr lang="en-US" sz="2400" dirty="0"/>
           </a:p>
@@ -7897,7 +7897,7 @@
                 <a:ea typeface="Calibri" pitchFamily="34" charset="-122"/>
                 <a:cs typeface="Calibri" pitchFamily="34" charset="-120"/>
               </a:rPr>
-              <a:t>volt (V)</a:t>
+              <a:t>ohm (Ω)</a:t>
             </a:r>
             <a:endParaRPr lang="en-US" sz="2400" dirty="0"/>
           </a:p>
@@ -7934,7 +7934,7 @@
                 <a:ea typeface="Calibri" pitchFamily="34" charset="-122"/>
                 <a:cs typeface="Calibri" pitchFamily="34" charset="-120"/>
               </a:rPr>
-              <a:t>coulomb (C)</a:t>
+              <a:t>volt (V)</a:t>
             </a:r>
             <a:endParaRPr lang="en-US" sz="2400" dirty="0"/>
           </a:p>
@@ -7971,7 +7971,7 @@
                 <a:ea typeface="Calibri" pitchFamily="34" charset="-122"/>
                 <a:cs typeface="Calibri" pitchFamily="34" charset="-120"/>
               </a:rPr>
-              <a:t>ohm (Ω)</a:t>
+              <a:t>ampere (A)</a:t>
             </a:r>
             <a:endParaRPr lang="en-US" sz="2400" dirty="0"/>
           </a:p>
@@ -8175,7 +8175,7 @@
                 <a:ea typeface="Calibri" pitchFamily="34" charset="-122"/>
                 <a:cs typeface="Calibri" pitchFamily="34" charset="-120"/>
               </a:rPr>
-              <a:t>the rate of flow of charge</a:t>
+              <a:t>the opposition to the flow of charge</a:t>
             </a:r>
             <a:endParaRPr lang="en-US" sz="2000" dirty="0"/>
           </a:p>
@@ -8286,7 +8286,7 @@
                 <a:ea typeface="Calibri" pitchFamily="34" charset="-122"/>
                 <a:cs typeface="Calibri" pitchFamily="34" charset="-120"/>
               </a:rPr>
-              <a:t>the opposition to the flow of charge</a:t>
+              <a:t>the rate of flow of charge</a:t>
             </a:r>
             <a:endParaRPr lang="en-US" sz="2000" dirty="0"/>
           </a:p>
@@ -8937,7 +8937,7 @@
                 <a:ea typeface="Calibri" pitchFamily="34" charset="-122"/>
                 <a:cs typeface="Calibri" pitchFamily="34" charset="-120"/>
               </a:rPr>
-              <a:t>C   coulomb (C)</a:t>
+              <a:t>A   coulomb (C)</a:t>
             </a:r>
             <a:endParaRPr lang="en-US" sz="2200" dirty="0"/>
           </a:p>
@@ -9187,7 +9187,7 @@
                 <a:ea typeface="Calibri" pitchFamily="34" charset="-122"/>
                 <a:cs typeface="Calibri" pitchFamily="34" charset="-120"/>
               </a:rPr>
-              <a:t>A   the rate of flow of charge</a:t>
+              <a:t>D   the rate of flow of charge</a:t>
             </a:r>
             <a:endParaRPr lang="en-US" sz="2200" dirty="0"/>
           </a:p>

--- a/decks/combined-circuits/combined-circuits_ch2_charge-and-current.pptx
+++ b/decks/combined-circuits/combined-circuits_ch2_charge-and-current.pptx
@@ -121,47 +121,47 @@
   <p:extLst>
     <p:ext uri="{521415D9-36F7-43E2-AB2F-B90AF26B5E84}">
       <p14:sectionLst xmlns:p14="http://schemas.microsoft.com/office/powerpoint/2010/main">
-        <p14:section name="Opening" id="{49bfefda-e58c-c958-f493-9e47c7b62fe0}">
+        <p14:section name="Opening" id="{78c5e0e0-031a-a1e6-11b0-855e11e36d18}">
           <p14:sldIdLst>
             <p14:sldId id="256"/>
           </p14:sldIdLst>
         </p14:section>
-        <p14:section name="Gate" id="{2b6a2d31-9393-435c-ed5a-a0ed9ab0a35a}">
+        <p14:section name="Gate" id="{9d141017-98a9-a6ca-dc13-9692949958b1}">
           <p14:sldIdLst>
             <p14:sldId id="257"/>
             <p14:sldId id="258"/>
           </p14:sldIdLst>
         </p14:section>
-        <p14:section name="Pre-teach" id="{7b73f02a-61ab-10e5-2f8c-465db1da7e96}">
+        <p14:section name="Pre-teach" id="{4232ecba-b829-2a25-7455-7ba8f92d62f2}">
           <p14:sldIdLst>
             <p14:sldId id="259"/>
           </p14:sldIdLst>
         </p14:section>
-        <p14:section name="Read-along" id="{b56089b0-1a9a-4ac6-2463-2136a40d7c98}">
+        <p14:section name="Read-along" id="{999dfc59-5b54-562c-0a2d-5f1ab349d0c2}">
           <p14:sldIdLst>
             <p14:sldId id="260"/>
             <p14:sldId id="261"/>
           </p14:sldIdLst>
         </p14:section>
-        <p14:section name="Teach" id="{566af7ce-f839-0dec-0794-9f9beba8cfb1}">
+        <p14:section name="Teach" id="{5a558122-a834-262b-6a38-a03bd7337445}">
           <p14:sldIdLst>
             <p14:sldId id="262"/>
             <p14:sldId id="263"/>
             <p14:sldId id="264"/>
           </p14:sldIdLst>
         </p14:section>
-        <p14:section name="Routes" id="{e18d2673-37ce-c747-1452-e0164fe5d96e}">
+        <p14:section name="Routes" id="{75279ba1-509a-c5e5-6bcd-93513d1ad401}">
           <p14:sldIdLst>
             <p14:sldId id="265"/>
             <p14:sldId id="266"/>
           </p14:sldIdLst>
         </p14:section>
-        <p14:section name="Close" id="{f090f7a3-4ca7-1825-4f43-69910a8759be}">
+        <p14:section name="Close" id="{aa8afe54-dd45-2a7b-7101-0a7d92ff2621}">
           <p14:sldIdLst>
             <p14:sldId id="267"/>
           </p14:sldIdLst>
         </p14:section>
-        <p14:section name="Answers" id="{5f1de24b-44bb-1bf4-8bda-989511173f32}">
+        <p14:section name="Answers" id="{b2cb1277-4829-a36c-1899-9c5db8719894}">
           <p14:sldIdLst>
             <p14:sldId id="268"/>
             <p14:sldId id="269"/>
